--- a/SPM_MGVI/fr/fisiere/LP02.pptx
+++ b/SPM_MGVI/fr/fisiere/LP02.pptx
@@ -23020,14 +23020,14 @@
           <a:ln/>
         </p:spPr>
         <p:txBody>
-          <a:bodyPr wrap="square" lIns="0" tIns="0" rIns="0" bIns="0" rtlCol="0" anchor="ctr"/>
+          <a:bodyPr wrap="square" lIns="228600" tIns="0" rIns="228600" bIns="0" rtlCol="0" anchor="ctr"/>
           <a:lstStyle/>
           <a:p>
             <a:pPr algn="ctr" indent="0" marL="0">
               <a:buNone/>
             </a:pPr>
             <a:r>
-              <a:rPr lang="en-US" sz="1400" dirty="0">
+              <a:rPr lang="en-US" sz="1800" dirty="0" i="1">
                 <a:solidFill>
                   <a:srgbClr val="585A64"/>
                 </a:solidFill>
@@ -23035,7 +23035,7 @@
                 <a:ea typeface="Palatino Linotype" pitchFamily="34" charset="-122"/>
                 <a:cs typeface="Palatino Linotype" pitchFamily="34" charset="-120"/>
               </a:rPr>
-              <a:t>[code QR du formulaire]</a:t>
+              <a:t>Le code QR du formulaire de votre groupe s’affiche à l’écran, en salle.</a:t>
             </a:r>
             <a:endParaRPr lang="en-US" sz="1400" dirty="0"/>
           </a:p>
@@ -23074,7 +23074,7 @@
                 <a:ea typeface="Palatino Linotype" pitchFamily="34" charset="-122"/>
                 <a:cs typeface="Palatino Linotype" pitchFamily="34" charset="-120"/>
               </a:rPr>
-              <a:t>[lien court]</a:t>
+              <a:t/>
             </a:r>
             <a:endParaRPr lang="en-US" sz="1500" dirty="0"/>
           </a:p>
